--- a/stepik/razdel/02/presentation/output/presentation_stepik_2.pptx
+++ b/stepik/razdel/02/presentation/output/presentation_stepik_2.pptx
@@ -5420,7 +5420,7 @@
             </a:pPr>
             <a:r>
               <a:rPr/>
-              <a:t>Вопрос 18</a:t>
+              <a:t>Рисунок 18: Вопрос 18</a:t>
             </a:r>
           </a:p>
         </p:txBody>
@@ -5449,12 +5449,12 @@
       </p:grpSpPr>
       <p:sp>
         <p:nvSpPr>
-          <p:cNvPr id="3" name="Content Placeholder 2"/>
-          <p:cNvSpPr>
-            <a:spLocks noGrp="1"/>
-          </p:cNvSpPr>
-          <p:nvPr>
-            <p:ph idx="1"/>
+          <p:cNvPr id="2" name="Title 1"/>
+          <p:cNvSpPr>
+            <a:spLocks noGrp="1"/>
+          </p:cNvSpPr>
+          <p:nvPr>
+            <p:ph type="title"/>
           </p:nvPr>
         </p:nvSpPr>
         <p:spPr/>
@@ -5467,7 +5467,67 @@
             </a:pPr>
             <a:r>
               <a:rPr/>
-              <a:t> Вопрос 18 продолжение</a:t>
+              <a:t>Вопрос 18. Bowtie2 — stderr многопоточного запуска</a:t>
+            </a:r>
+          </a:p>
+        </p:txBody>
+      </p:sp>
+      <p:pic>
+        <p:nvPicPr>
+          <p:cNvPr descr="image/19.png" id="0" name="Picture 1"/>
+          <p:cNvPicPr>
+            <a:picLocks noGrp="1" noChangeAspect="1"/>
+          </p:cNvPicPr>
+          <p:nvPr/>
+        </p:nvPicPr>
+        <p:blipFill>
+          <a:blip r:embed="rId2"/>
+          <a:stretch>
+            <a:fillRect/>
+          </a:stretch>
+        </p:blipFill>
+        <p:spPr bwMode="auto">
+          <a:xfrm>
+            <a:off x="1409700" y="1193800"/>
+            <a:ext cx="6324600" cy="2882900"/>
+          </a:xfrm>
+          <a:prstGeom prst="rect">
+            <a:avLst/>
+          </a:prstGeom>
+          <a:noFill/>
+          <a:ln w="9525">
+            <a:noFill/>
+            <a:headEnd/>
+            <a:tailEnd/>
+          </a:ln>
+        </p:spPr>
+      </p:pic>
+      <p:sp>
+        <p:nvSpPr>
+          <p:cNvPr id="1" name="TextBox 3"/>
+          <p:cNvSpPr txBox="1"/>
+          <p:nvPr/>
+        </p:nvSpPr>
+        <p:spPr>
+          <a:xfrm>
+            <a:off x="457200" y="4076700"/>
+            <a:ext cx="8229600" cy="508000"/>
+          </a:xfrm>
+          <a:prstGeom prst="rect">
+            <a:avLst/>
+          </a:prstGeom>
+          <a:noFill/>
+        </p:spPr>
+        <p:txBody>
+          <a:bodyPr/>
+          <a:lstStyle/>
+          <a:p>
+            <a:pPr lvl="0" indent="0" marL="0" algn="ctr">
+              <a:buNone/>
+            </a:pPr>
+            <a:r>
+              <a:rPr/>
+              <a:t>Рисунок 19: Вопрос 18 продолжение</a:t>
             </a:r>
           </a:p>
         </p:txBody>
@@ -5673,7 +5733,7 @@
             </a:pPr>
             <a:r>
               <a:rPr/>
-              <a:t>Вопрос 19</a:t>
+              <a:t>Рисунок 20: Вопрос 19</a:t>
             </a:r>
           </a:p>
         </p:txBody>
@@ -5702,12 +5762,12 @@
       </p:grpSpPr>
       <p:sp>
         <p:nvSpPr>
-          <p:cNvPr id="3" name="Content Placeholder 2"/>
-          <p:cNvSpPr>
-            <a:spLocks noGrp="1"/>
-          </p:cNvSpPr>
-          <p:nvPr>
-            <p:ph idx="1"/>
+          <p:cNvPr id="2" name="Title 1"/>
+          <p:cNvSpPr>
+            <a:spLocks noGrp="1"/>
+          </p:cNvSpPr>
+          <p:nvPr>
+            <p:ph type="title"/>
           </p:nvPr>
         </p:nvSpPr>
         <p:spPr/>
@@ -5720,7 +5780,67 @@
             </a:pPr>
             <a:r>
               <a:rPr/>
-              <a:t> Вопрос 19 продолжение</a:t>
+              <a:t>Вопрос 19. tmux: последняя вкладка и exit</a:t>
+            </a:r>
+          </a:p>
+        </p:txBody>
+      </p:sp>
+      <p:pic>
+        <p:nvPicPr>
+          <p:cNvPr descr="image/21.png" id="0" name="Picture 1"/>
+          <p:cNvPicPr>
+            <a:picLocks noGrp="1" noChangeAspect="1"/>
+          </p:cNvPicPr>
+          <p:nvPr/>
+        </p:nvPicPr>
+        <p:blipFill>
+          <a:blip r:embed="rId2"/>
+          <a:stretch>
+            <a:fillRect/>
+          </a:stretch>
+        </p:blipFill>
+        <p:spPr bwMode="auto">
+          <a:xfrm>
+            <a:off x="965200" y="1193800"/>
+            <a:ext cx="7213600" cy="2882900"/>
+          </a:xfrm>
+          <a:prstGeom prst="rect">
+            <a:avLst/>
+          </a:prstGeom>
+          <a:noFill/>
+          <a:ln w="9525">
+            <a:noFill/>
+            <a:headEnd/>
+            <a:tailEnd/>
+          </a:ln>
+        </p:spPr>
+      </p:pic>
+      <p:sp>
+        <p:nvSpPr>
+          <p:cNvPr id="1" name="TextBox 3"/>
+          <p:cNvSpPr txBox="1"/>
+          <p:nvPr/>
+        </p:nvSpPr>
+        <p:spPr>
+          <a:xfrm>
+            <a:off x="457200" y="4076700"/>
+            <a:ext cx="8229600" cy="508000"/>
+          </a:xfrm>
+          <a:prstGeom prst="rect">
+            <a:avLst/>
+          </a:prstGeom>
+          <a:noFill/>
+        </p:spPr>
+        <p:txBody>
+          <a:bodyPr/>
+          <a:lstStyle/>
+          <a:p>
+            <a:pPr lvl="0" indent="0" marL="0" algn="ctr">
+              <a:buNone/>
+            </a:pPr>
+            <a:r>
+              <a:rPr/>
+              <a:t>Рисунок 21: Вопрос 19 продолжение</a:t>
             </a:r>
           </a:p>
         </p:txBody>
@@ -5972,7 +6092,7 @@
             </a:pPr>
             <a:r>
               <a:rPr/>
-              <a:t>Рисунок 18: Вопрос 20</a:t>
+              <a:t>Рисунок 22: Вопрос 20</a:t>
             </a:r>
           </a:p>
         </p:txBody>
@@ -6126,7 +6246,7 @@
             </a:pPr>
             <a:r>
               <a:rPr/>
-              <a:t>Рисунок 19: Вопрос 21</a:t>
+              <a:t>Рисунок 23: Вопрос 21</a:t>
             </a:r>
           </a:p>
         </p:txBody>
@@ -6280,7 +6400,7 @@
             </a:pPr>
             <a:r>
               <a:rPr/>
-              <a:t>Рисунок 20: Вопрос 22</a:t>
+              <a:t>Рисунок 24: Вопрос 22</a:t>
             </a:r>
           </a:p>
         </p:txBody>
@@ -6434,7 +6554,7 @@
             </a:pPr>
             <a:r>
               <a:rPr/>
-              <a:t>Рисунок 21: Вопрос 23</a:t>
+              <a:t>Рисунок 25: Вопрос 23</a:t>
             </a:r>
           </a:p>
         </p:txBody>

--- a/stepik/razdel/02/presentation/output/presentation_stepik_2.pptx
+++ b/stepik/razdel/02/presentation/output/presentation_stepik_2.pptx
@@ -3343,7 +3343,7 @@
             </a:r>
             <a:r>
               <a:rPr/>
-              <a:t> - Поискать терминальную версию - Запустить на своём компьютере</a:t>
+              <a:t> - Поискать терминальную версию - Настроитьь сервер</a:t>
             </a:r>
           </a:p>
           <a:p>
@@ -3356,7 +3356,7 @@
             </a:r>
             <a:r>
               <a:rPr/>
-              <a:t> Не у всех программ есть консольная версия. Если нет - придётся запускать там, где есть экран.</a:t>
+              <a:t> Не у всех программ есть консольная версия. Если нет - придётся запускать там, где есть экран, так же проверить сервер.</a:t>
             </a:r>
           </a:p>
         </p:txBody>
@@ -3651,7 +3651,7 @@
             </a:r>
             <a:r>
               <a:rPr/>
-              <a:t> fastq, fasta, bam, sam</a:t>
+              <a:t> fastq</a:t>
             </a:r>
           </a:p>
           <a:p>
@@ -4113,7 +4113,7 @@
             </a:r>
             <a:r>
               <a:rPr/>
-              <a:t> У всех одинаковые</a:t>
+              <a:t> Одинаковые только у ps и top</a:t>
             </a:r>
           </a:p>
           <a:p>
@@ -4126,7 +4126,37 @@
             </a:r>
             <a:r>
               <a:rPr/>
-              <a:t> PID - это номер процесса в системе. Где бы ты на него ни посмотрел, он один и тот же.</a:t>
+              <a:t> </a:t>
+            </a:r>
+            <a:r>
+              <a:rPr>
+                <a:latin typeface="Courier"/>
+              </a:rPr>
+              <a:t>ps</a:t>
+            </a:r>
+            <a:r>
+              <a:rPr/>
+              <a:t> и </a:t>
+            </a:r>
+            <a:r>
+              <a:rPr>
+                <a:latin typeface="Courier"/>
+              </a:rPr>
+              <a:t>top</a:t>
+            </a:r>
+            <a:r>
+              <a:rPr/>
+              <a:t> показывают PID процесса — он одинаков в обеих утилитах. </a:t>
+            </a:r>
+            <a:r>
+              <a:rPr>
+                <a:latin typeface="Courier"/>
+              </a:rPr>
+              <a:t>jobs</a:t>
+            </a:r>
+            <a:r>
+              <a:rPr/>
+              <a:t> показывает номер задачи (job ID) внутри оболочки, который не совпадает с PID.</a:t>
             </a:r>
           </a:p>
         </p:txBody>
@@ -7308,7 +7338,7 @@
             </a:r>
             <a:r>
               <a:rPr/>
-              <a:t> - Проверить интернет - Проверить место на диске</a:t>
+              <a:t> - Проверить интернет - Использовать update</a:t>
             </a:r>
           </a:p>
           <a:p>
@@ -7321,7 +7351,7 @@
             </a:r>
             <a:r>
               <a:rPr/>
-              <a:t> Если нет интернета - неоткуда скачать. Если место кончилось - некуда сохранять.</a:t>
+              <a:t> Если нет интернета - неоткуда скачать.</a:t>
             </a:r>
           </a:p>
         </p:txBody>
